--- a/youtube_ranking_20260614.pptx
+++ b/youtube_ranking_20260614.pptx
@@ -3597,7 +3597,7 @@
                 </a:solidFill>
                 <a:latin typeface="Arial"/>
               </a:rPr>
-              <a:t>⏱ 53:59  ·  📅 公開12時間前</a:t>
+              <a:t>⏱ 53:59  ·  📅 公開15時間前</a:t>
             </a:r>
           </a:p>
         </p:txBody>
@@ -3632,7 +3632,7 @@
                 </a:solidFill>
                 <a:latin typeface="Arial"/>
               </a:rPr>
-              <a:t>💡 公開12時間で急上昇入り！　10万再生突破の話題作　前日比+161.1%と急拡散中</a:t>
+              <a:t>💡 公開15時間で急上昇入り！　10万再生突破の話題作　前日比+161.1%と急拡散中</a:t>
             </a:r>
           </a:p>
         </p:txBody>
@@ -3957,7 +3957,7 @@
                 </a:solidFill>
                 <a:latin typeface="Arial"/>
               </a:rPr>
-              <a:t>👁 308,729  👍 46,275  💬 1,624  ⏱ 3:51  📅 公開9時間前</a:t>
+              <a:t>👁 308,729  👍 46,275  💬 1,624  ⏱ 3:51  📅 公開13時間前</a:t>
             </a:r>
           </a:p>
         </p:txBody>
@@ -3992,7 +3992,7 @@
                 </a:solidFill>
                 <a:latin typeface="Arial"/>
               </a:rPr>
-              <a:t>💡 公開9時間で急上昇入り！　10万再生突破の話題作　前日比+848.3%の爆発的な伸び</a:t>
+              <a:t>💡 公開13時間で急上昇入り！　10万再生突破の話題作　前日比+848.3%の爆発的な伸び</a:t>
             </a:r>
           </a:p>
         </p:txBody>
@@ -9435,7 +9435,7 @@
                 </a:solidFill>
                 <a:latin typeface="Arial"/>
               </a:rPr>
-              <a:t>⏱ 6:10:44  ·  📅 公開8時間前</a:t>
+              <a:t>⏱ 6:10:44  ·  📅 公開11時間前</a:t>
             </a:r>
           </a:p>
         </p:txBody>
@@ -9470,7 +9470,7 @@
                 </a:solidFill>
                 <a:latin typeface="Arial"/>
               </a:rPr>
-              <a:t>💡 公開8時間で急上昇入り！　10万再生突破の話題作</a:t>
+              <a:t>💡 公開11時間で急上昇入り！　10万再生突破の話題作</a:t>
             </a:r>
           </a:p>
         </p:txBody>
@@ -9814,7 +9814,7 @@
                 </a:solidFill>
                 <a:latin typeface="Arial"/>
               </a:rPr>
-              <a:t>⏱ 3:16  ·  📅 公開9時間前</a:t>
+              <a:t>⏱ 3:16  ·  📅 公開13時間前</a:t>
             </a:r>
           </a:p>
         </p:txBody>
@@ -9849,7 +9849,7 @@
                 </a:solidFill>
                 <a:latin typeface="Arial"/>
               </a:rPr>
-              <a:t>💡 公開9時間で急上昇入り！　10万再生突破の話題作　前日比+268.0%の爆発的な伸び</a:t>
+              <a:t>💡 公開13時間で急上昇入り！　10万再生突破の話題作　前日比+268.0%の爆発的な伸び</a:t>
             </a:r>
           </a:p>
         </p:txBody>
@@ -10193,7 +10193,7 @@
                 </a:solidFill>
                 <a:latin typeface="Arial"/>
               </a:rPr>
-              <a:t>⏱ 2:13:52  ·  📅 公開7時間前</a:t>
+              <a:t>⏱ 2:13:52  ·  📅 公開10時間前</a:t>
             </a:r>
           </a:p>
         </p:txBody>
@@ -10228,7 +10228,7 @@
                 </a:solidFill>
                 <a:latin typeface="Arial"/>
               </a:rPr>
-              <a:t>💡 公開7時間で急上昇入り！　10万再生突破の話題作　いいね率4.7%と好評価</a:t>
+              <a:t>💡 公開10時間で急上昇入り！　10万再生突破の話題作　いいね率4.7%と好評価</a:t>
             </a:r>
           </a:p>
         </p:txBody>
@@ -10572,7 +10572,7 @@
                 </a:solidFill>
                 <a:latin typeface="Arial"/>
               </a:rPr>
-              <a:t>⏱ 3:34  ·  📅 公開12時間前</a:t>
+              <a:t>⏱ 3:34  ·  📅 公開16時間前</a:t>
             </a:r>
           </a:p>
         </p:txBody>
@@ -10607,7 +10607,7 @@
                 </a:solidFill>
                 <a:latin typeface="Arial"/>
               </a:rPr>
-              <a:t>💡 公開12時間で急上昇入り！　急上昇中の新興コンテンツ　前日比+95.1%と急拡散中</a:t>
+              <a:t>💡 公開16時間で急上昇入り！　急上昇中の新興コンテンツ　前日比+95.1%と急拡散中</a:t>
             </a:r>
           </a:p>
         </p:txBody>
@@ -10951,7 +10951,7 @@
                 </a:solidFill>
                 <a:latin typeface="Arial"/>
               </a:rPr>
-              <a:t>⏱ 5:38:53  ·  📅 公開9時間前</a:t>
+              <a:t>⏱ 5:38:53  ·  📅 公開13時間前</a:t>
             </a:r>
           </a:p>
         </p:txBody>
@@ -10986,7 +10986,7 @@
                 </a:solidFill>
                 <a:latin typeface="Arial"/>
               </a:rPr>
-              <a:t>💡 公開9時間で急上昇入り！　50万再生の注目コンテンツ</a:t>
+              <a:t>💡 公開13時間で急上昇入り！　50万再生の注目コンテンツ</a:t>
             </a:r>
           </a:p>
         </p:txBody>
@@ -11330,7 +11330,7 @@
                 </a:solidFill>
                 <a:latin typeface="Arial"/>
               </a:rPr>
-              <a:t>⏱ 3:01  ·  📅 公開6時間前</a:t>
+              <a:t>⏱ 3:01  ·  📅 公開10時間前</a:t>
             </a:r>
           </a:p>
         </p:txBody>
@@ -11365,7 +11365,7 @@
                 </a:solidFill>
                 <a:latin typeface="Arial"/>
               </a:rPr>
-              <a:t>💡 公開6時間で急上昇入り！　100万再生超の大ヒット　いいね率10.4%と視聴者の支持が非常に高い</a:t>
+              <a:t>💡 公開10時間で急上昇入り！　100万再生超の大ヒット　いいね率10.4%と視聴者の支持が非常に高い</a:t>
             </a:r>
           </a:p>
         </p:txBody>
@@ -11709,7 +11709,7 @@
                 </a:solidFill>
                 <a:latin typeface="Arial"/>
               </a:rPr>
-              <a:t>⏱ 54:05  ·  📅 公開-5時間前</a:t>
+              <a:t>⏱ 54:05  ·  📅 公開-1時間前</a:t>
             </a:r>
           </a:p>
         </p:txBody>
@@ -11744,7 +11744,7 @@
                 </a:solidFill>
                 <a:latin typeface="Arial"/>
               </a:rPr>
-              <a:t>💡 公開-5時間で急上昇入り！　急上昇中の新興コンテンツ　いいね率2.9%と好評価</a:t>
+              <a:t>💡 公開-1時間で急上昇入り！　急上昇中の新興コンテンツ　いいね率2.9%と好評価</a:t>
             </a:r>
           </a:p>
         </p:txBody>
@@ -12088,7 +12088,7 @@
                 </a:solidFill>
                 <a:latin typeface="Arial"/>
               </a:rPr>
-              <a:t>⏱ 2:39  ·  📅 公開13時間前</a:t>
+              <a:t>⏱ 2:39  ·  📅 公開17時間前</a:t>
             </a:r>
           </a:p>
         </p:txBody>
@@ -12123,7 +12123,7 @@
                 </a:solidFill>
                 <a:latin typeface="Arial"/>
               </a:rPr>
-              <a:t>💡 公開13時間で急上昇入り！　10万再生突破の話題作　いいね率10.0%と視聴者の支持が非常に高い</a:t>
+              <a:t>💡 公開17時間で急上昇入り！　10万再生突破の話題作　いいね率10.0%と視聴者の支持が非常に高い</a:t>
             </a:r>
           </a:p>
         </p:txBody>
